--- a/VI Sem/Test Automation/Intro.pptx
+++ b/VI Sem/Test Automation/Intro.pptx
@@ -7,6 +7,10 @@
   <p:sldIdLst>
     <p:sldId id="256" r:id="rId2"/>
     <p:sldId id="257" r:id="rId3"/>
+    <p:sldId id="258" r:id="rId4"/>
+    <p:sldId id="259" r:id="rId5"/>
+    <p:sldId id="260" r:id="rId6"/>
+    <p:sldId id="261" r:id="rId7"/>
   </p:sldIdLst>
   <p:sldSz cx="12192000" cy="6858000"/>
   <p:notesSz cx="6858000" cy="9144000"/>
@@ -105,53 +109,88 @@
       </a:defRPr>
     </a:lvl9pPr>
   </p:defaultTextStyle>
+  <p:extLst>
+    <p:ext uri="{EFAFB233-063F-42B5-8137-9DF3F51BA10A}">
+      <p15:sldGuideLst xmlns:p15="http://schemas.microsoft.com/office/powerpoint/2012/main"/>
+    </p:ext>
+  </p:extLst>
 </p:presentation>
-</file>
-
-<file path=ppt/revisionInfo.xml><?xml version="1.0" encoding="utf-8"?>
-<p1510:revInfo xmlns:a="http://schemas.openxmlformats.org/drawingml/2006/main" xmlns:r="http://schemas.openxmlformats.org/officeDocument/2006/relationships" xmlns:p1510="http://schemas.microsoft.com/office/powerpoint/2015/10/main">
-  <p1510:revLst>
-    <p1510:client id="{47CD8B01-FA55-4EA7-AF8C-5F16A228F468}" v="2" dt="2026-03-06T04:32:07.945"/>
-  </p1510:revLst>
-</p1510:revInfo>
 </file>
 
 <file path=ppt/changesInfos/changesInfo1.xml><?xml version="1.0" encoding="utf-8"?>
 <pc:chgInfo xmlns:a="http://schemas.openxmlformats.org/drawingml/2006/main" xmlns:r="http://schemas.openxmlformats.org/officeDocument/2006/relationships" xmlns:ac="http://schemas.microsoft.com/office/drawing/2013/main/command" xmlns:pc="http://schemas.microsoft.com/office/powerpoint/2013/main/command">
   <pc:docChgLst>
     <pc:chgData name="Utkarsh Agarwal" userId="7a1216fa42ee05d0" providerId="LiveId" clId="{5A8ABE04-300D-46CD-9942-40B59078845C}"/>
-    <pc:docChg chg="addSld modSld">
-      <pc:chgData name="Utkarsh Agarwal" userId="7a1216fa42ee05d0" providerId="LiveId" clId="{5A8ABE04-300D-46CD-9942-40B59078845C}" dt="2026-03-06T04:32:11.102" v="4" actId="22"/>
+    <pc:docChg chg="undo custSel addSld modSld">
+      <pc:chgData name="Utkarsh Agarwal" userId="7a1216fa42ee05d0" providerId="LiveId" clId="{5A8ABE04-300D-46CD-9942-40B59078845C}" dt="2026-04-08T15:29:10.636" v="16" actId="22"/>
       <pc:docMkLst>
         <pc:docMk/>
       </pc:docMkLst>
       <pc:sldChg chg="addSp modSp new mod">
-        <pc:chgData name="Utkarsh Agarwal" userId="7a1216fa42ee05d0" providerId="LiveId" clId="{5A8ABE04-300D-46CD-9942-40B59078845C}" dt="2026-03-06T04:31:57.314" v="2"/>
+        <pc:chgData name="Utkarsh Agarwal" userId="7a1216fa42ee05d0" providerId="LiveId" clId="{5A8ABE04-300D-46CD-9942-40B59078845C}" dt="2026-04-08T15:23:16.332" v="8" actId="1076"/>
         <pc:sldMkLst>
           <pc:docMk/>
-          <pc:sldMk cId="4066331514" sldId="256"/>
+          <pc:sldMk cId="829171626" sldId="258"/>
         </pc:sldMkLst>
         <pc:picChg chg="add mod">
-          <ac:chgData name="Utkarsh Agarwal" userId="7a1216fa42ee05d0" providerId="LiveId" clId="{5A8ABE04-300D-46CD-9942-40B59078845C}" dt="2026-03-06T04:31:57.314" v="2"/>
+          <ac:chgData name="Utkarsh Agarwal" userId="7a1216fa42ee05d0" providerId="LiveId" clId="{5A8ABE04-300D-46CD-9942-40B59078845C}" dt="2026-04-08T15:23:16.332" v="8" actId="1076"/>
           <ac:picMkLst>
             <pc:docMk/>
-            <pc:sldMk cId="4066331514" sldId="256"/>
-            <ac:picMk id="5" creationId="{EC104FD6-4C3B-64F5-F763-6C8AD63CEE7C}"/>
+            <pc:sldMk cId="829171626" sldId="258"/>
+            <ac:picMk id="5" creationId="{E0B4CB88-6F42-8EDB-B470-0F5912BFFA06}"/>
+          </ac:picMkLst>
+        </pc:picChg>
+      </pc:sldChg>
+      <pc:sldChg chg="addSp delSp new mod">
+        <pc:chgData name="Utkarsh Agarwal" userId="7a1216fa42ee05d0" providerId="LiveId" clId="{5A8ABE04-300D-46CD-9942-40B59078845C}" dt="2026-04-08T15:26:09.967" v="12" actId="22"/>
+        <pc:sldMkLst>
+          <pc:docMk/>
+          <pc:sldMk cId="1931896425" sldId="259"/>
+        </pc:sldMkLst>
+        <pc:picChg chg="add del">
+          <ac:chgData name="Utkarsh Agarwal" userId="7a1216fa42ee05d0" providerId="LiveId" clId="{5A8ABE04-300D-46CD-9942-40B59078845C}" dt="2026-04-08T15:26:09.290" v="11" actId="22"/>
+          <ac:picMkLst>
+            <pc:docMk/>
+            <pc:sldMk cId="1931896425" sldId="259"/>
+            <ac:picMk id="5" creationId="{7BE4FE19-F24C-0B3E-9E34-EB95AEB179EC}"/>
+          </ac:picMkLst>
+        </pc:picChg>
+        <pc:picChg chg="add">
+          <ac:chgData name="Utkarsh Agarwal" userId="7a1216fa42ee05d0" providerId="LiveId" clId="{5A8ABE04-300D-46CD-9942-40B59078845C}" dt="2026-04-08T15:26:09.967" v="12" actId="22"/>
+          <ac:picMkLst>
+            <pc:docMk/>
+            <pc:sldMk cId="1931896425" sldId="259"/>
+            <ac:picMk id="7" creationId="{55703D91-C6FE-DF37-E790-12BF14C64E29}"/>
           </ac:picMkLst>
         </pc:picChg>
       </pc:sldChg>
       <pc:sldChg chg="addSp new mod">
-        <pc:chgData name="Utkarsh Agarwal" userId="7a1216fa42ee05d0" providerId="LiveId" clId="{5A8ABE04-300D-46CD-9942-40B59078845C}" dt="2026-03-06T04:32:11.102" v="4" actId="22"/>
+        <pc:chgData name="Utkarsh Agarwal" userId="7a1216fa42ee05d0" providerId="LiveId" clId="{5A8ABE04-300D-46CD-9942-40B59078845C}" dt="2026-04-08T15:26:53.717" v="14" actId="22"/>
         <pc:sldMkLst>
           <pc:docMk/>
-          <pc:sldMk cId="3867838797" sldId="257"/>
+          <pc:sldMk cId="2950099178" sldId="260"/>
         </pc:sldMkLst>
         <pc:picChg chg="add">
-          <ac:chgData name="Utkarsh Agarwal" userId="7a1216fa42ee05d0" providerId="LiveId" clId="{5A8ABE04-300D-46CD-9942-40B59078845C}" dt="2026-03-06T04:32:11.102" v="4" actId="22"/>
+          <ac:chgData name="Utkarsh Agarwal" userId="7a1216fa42ee05d0" providerId="LiveId" clId="{5A8ABE04-300D-46CD-9942-40B59078845C}" dt="2026-04-08T15:26:53.717" v="14" actId="22"/>
           <ac:picMkLst>
             <pc:docMk/>
-            <pc:sldMk cId="3867838797" sldId="257"/>
-            <ac:picMk id="5" creationId="{4B73D155-B1E3-DBE5-8F1D-4C97AD854DBC}"/>
+            <pc:sldMk cId="2950099178" sldId="260"/>
+            <ac:picMk id="5" creationId="{587E643B-DE8C-4DAF-411E-A1BFC14CC38C}"/>
+          </ac:picMkLst>
+        </pc:picChg>
+      </pc:sldChg>
+      <pc:sldChg chg="addSp new mod">
+        <pc:chgData name="Utkarsh Agarwal" userId="7a1216fa42ee05d0" providerId="LiveId" clId="{5A8ABE04-300D-46CD-9942-40B59078845C}" dt="2026-04-08T15:29:10.636" v="16" actId="22"/>
+        <pc:sldMkLst>
+          <pc:docMk/>
+          <pc:sldMk cId="3462483619" sldId="261"/>
+        </pc:sldMkLst>
+        <pc:picChg chg="add">
+          <ac:chgData name="Utkarsh Agarwal" userId="7a1216fa42ee05d0" providerId="LiveId" clId="{5A8ABE04-300D-46CD-9942-40B59078845C}" dt="2026-04-08T15:29:10.636" v="16" actId="22"/>
+          <ac:picMkLst>
+            <pc:docMk/>
+            <pc:sldMk cId="3462483619" sldId="261"/>
+            <ac:picMk id="5" creationId="{D83C755F-8864-38D3-43AE-BB9E99AAD3C5}"/>
           </ac:picMkLst>
         </pc:picChg>
       </pc:sldChg>
@@ -309,7 +348,7 @@
           <a:p>
             <a:fld id="{1412C0A6-D859-4CBA-8537-BB34A8D87864}" type="datetimeFigureOut">
               <a:rPr lang="en-IN" smtClean="0"/>
-              <a:t>06-03-2026</a:t>
+              <a:t>08-04-2026</a:t>
             </a:fld>
             <a:endParaRPr lang="en-IN"/>
           </a:p>
@@ -509,7 +548,7 @@
           <a:p>
             <a:fld id="{1412C0A6-D859-4CBA-8537-BB34A8D87864}" type="datetimeFigureOut">
               <a:rPr lang="en-IN" smtClean="0"/>
-              <a:t>06-03-2026</a:t>
+              <a:t>08-04-2026</a:t>
             </a:fld>
             <a:endParaRPr lang="en-IN"/>
           </a:p>
@@ -719,7 +758,7 @@
           <a:p>
             <a:fld id="{1412C0A6-D859-4CBA-8537-BB34A8D87864}" type="datetimeFigureOut">
               <a:rPr lang="en-IN" smtClean="0"/>
-              <a:t>06-03-2026</a:t>
+              <a:t>08-04-2026</a:t>
             </a:fld>
             <a:endParaRPr lang="en-IN"/>
           </a:p>
@@ -919,7 +958,7 @@
           <a:p>
             <a:fld id="{1412C0A6-D859-4CBA-8537-BB34A8D87864}" type="datetimeFigureOut">
               <a:rPr lang="en-IN" smtClean="0"/>
-              <a:t>06-03-2026</a:t>
+              <a:t>08-04-2026</a:t>
             </a:fld>
             <a:endParaRPr lang="en-IN"/>
           </a:p>
@@ -1195,7 +1234,7 @@
           <a:p>
             <a:fld id="{1412C0A6-D859-4CBA-8537-BB34A8D87864}" type="datetimeFigureOut">
               <a:rPr lang="en-IN" smtClean="0"/>
-              <a:t>06-03-2026</a:t>
+              <a:t>08-04-2026</a:t>
             </a:fld>
             <a:endParaRPr lang="en-IN"/>
           </a:p>
@@ -1463,7 +1502,7 @@
           <a:p>
             <a:fld id="{1412C0A6-D859-4CBA-8537-BB34A8D87864}" type="datetimeFigureOut">
               <a:rPr lang="en-IN" smtClean="0"/>
-              <a:t>06-03-2026</a:t>
+              <a:t>08-04-2026</a:t>
             </a:fld>
             <a:endParaRPr lang="en-IN"/>
           </a:p>
@@ -1878,7 +1917,7 @@
           <a:p>
             <a:fld id="{1412C0A6-D859-4CBA-8537-BB34A8D87864}" type="datetimeFigureOut">
               <a:rPr lang="en-IN" smtClean="0"/>
-              <a:t>06-03-2026</a:t>
+              <a:t>08-04-2026</a:t>
             </a:fld>
             <a:endParaRPr lang="en-IN"/>
           </a:p>
@@ -2020,7 +2059,7 @@
           <a:p>
             <a:fld id="{1412C0A6-D859-4CBA-8537-BB34A8D87864}" type="datetimeFigureOut">
               <a:rPr lang="en-IN" smtClean="0"/>
-              <a:t>06-03-2026</a:t>
+              <a:t>08-04-2026</a:t>
             </a:fld>
             <a:endParaRPr lang="en-IN"/>
           </a:p>
@@ -2133,7 +2172,7 @@
           <a:p>
             <a:fld id="{1412C0A6-D859-4CBA-8537-BB34A8D87864}" type="datetimeFigureOut">
               <a:rPr lang="en-IN" smtClean="0"/>
-              <a:t>06-03-2026</a:t>
+              <a:t>08-04-2026</a:t>
             </a:fld>
             <a:endParaRPr lang="en-IN"/>
           </a:p>
@@ -2446,7 +2485,7 @@
           <a:p>
             <a:fld id="{1412C0A6-D859-4CBA-8537-BB34A8D87864}" type="datetimeFigureOut">
               <a:rPr lang="en-IN" smtClean="0"/>
-              <a:t>06-03-2026</a:t>
+              <a:t>08-04-2026</a:t>
             </a:fld>
             <a:endParaRPr lang="en-IN"/>
           </a:p>
@@ -2735,7 +2774,7 @@
           <a:p>
             <a:fld id="{1412C0A6-D859-4CBA-8537-BB34A8D87864}" type="datetimeFigureOut">
               <a:rPr lang="en-IN" smtClean="0"/>
-              <a:t>06-03-2026</a:t>
+              <a:t>08-04-2026</a:t>
             </a:fld>
             <a:endParaRPr lang="en-IN"/>
           </a:p>
@@ -2978,7 +3017,7 @@
           <a:p>
             <a:fld id="{1412C0A6-D859-4CBA-8537-BB34A8D87864}" type="datetimeFigureOut">
               <a:rPr lang="en-IN" smtClean="0"/>
-              <a:t>06-03-2026</a:t>
+              <a:t>08-04-2026</a:t>
             </a:fld>
             <a:endParaRPr lang="en-IN"/>
           </a:p>
@@ -3589,6 +3628,446 @@
     <p:extLst>
       <p:ext uri="{BB962C8B-B14F-4D97-AF65-F5344CB8AC3E}">
         <p14:creationId xmlns:p14="http://schemas.microsoft.com/office/powerpoint/2010/main" val="3867838797"/>
+      </p:ext>
+    </p:extLst>
+  </p:cSld>
+  <p:clrMapOvr>
+    <a:masterClrMapping/>
+  </p:clrMapOvr>
+</p:sld>
+</file>
+
+<file path=ppt/slides/slide3.xml><?xml version="1.0" encoding="utf-8"?>
+<p:sld xmlns:a="http://schemas.openxmlformats.org/drawingml/2006/main" xmlns:r="http://schemas.openxmlformats.org/officeDocument/2006/relationships" xmlns:p="http://schemas.openxmlformats.org/presentationml/2006/main">
+  <p:cSld>
+    <p:spTree>
+      <p:nvGrpSpPr>
+        <p:cNvPr id="1" name=""/>
+        <p:cNvGrpSpPr/>
+        <p:nvPr/>
+      </p:nvGrpSpPr>
+      <p:grpSpPr>
+        <a:xfrm>
+          <a:off x="0" y="0"/>
+          <a:ext cx="0" cy="0"/>
+          <a:chOff x="0" y="0"/>
+          <a:chExt cx="0" cy="0"/>
+        </a:xfrm>
+      </p:grpSpPr>
+      <p:sp>
+        <p:nvSpPr>
+          <p:cNvPr id="2" name="Title 1">
+            <a:extLst>
+              <a:ext uri="{FF2B5EF4-FFF2-40B4-BE49-F238E27FC236}">
+                <a16:creationId xmlns:a16="http://schemas.microsoft.com/office/drawing/2014/main" id="{7F87572A-04EB-362E-A85F-1105717162A6}"/>
+              </a:ext>
+            </a:extLst>
+          </p:cNvPr>
+          <p:cNvSpPr>
+            <a:spLocks noGrp="1"/>
+          </p:cNvSpPr>
+          <p:nvPr>
+            <p:ph type="title"/>
+          </p:nvPr>
+        </p:nvSpPr>
+        <p:spPr/>
+        <p:txBody>
+          <a:bodyPr/>
+          <a:lstStyle/>
+          <a:p>
+            <a:endParaRPr lang="en-IN"/>
+          </a:p>
+        </p:txBody>
+      </p:sp>
+      <p:sp>
+        <p:nvSpPr>
+          <p:cNvPr id="3" name="Content Placeholder 2">
+            <a:extLst>
+              <a:ext uri="{FF2B5EF4-FFF2-40B4-BE49-F238E27FC236}">
+                <a16:creationId xmlns:a16="http://schemas.microsoft.com/office/drawing/2014/main" id="{747265DC-0BBC-E037-4C27-D2C1612A1EC6}"/>
+              </a:ext>
+            </a:extLst>
+          </p:cNvPr>
+          <p:cNvSpPr>
+            <a:spLocks noGrp="1"/>
+          </p:cNvSpPr>
+          <p:nvPr>
+            <p:ph idx="1"/>
+          </p:nvPr>
+        </p:nvSpPr>
+        <p:spPr/>
+        <p:txBody>
+          <a:bodyPr/>
+          <a:lstStyle/>
+          <a:p>
+            <a:endParaRPr lang="en-IN"/>
+          </a:p>
+        </p:txBody>
+      </p:sp>
+      <p:pic>
+        <p:nvPicPr>
+          <p:cNvPr id="5" name="Picture 4">
+            <a:extLst>
+              <a:ext uri="{FF2B5EF4-FFF2-40B4-BE49-F238E27FC236}">
+                <a16:creationId xmlns:a16="http://schemas.microsoft.com/office/drawing/2014/main" id="{E0B4CB88-6F42-8EDB-B470-0F5912BFFA06}"/>
+              </a:ext>
+            </a:extLst>
+          </p:cNvPr>
+          <p:cNvPicPr>
+            <a:picLocks noChangeAspect="1"/>
+          </p:cNvPicPr>
+          <p:nvPr/>
+        </p:nvPicPr>
+        <p:blipFill>
+          <a:blip r:embed="rId2"/>
+          <a:stretch>
+            <a:fillRect/>
+          </a:stretch>
+        </p:blipFill>
+        <p:spPr>
+          <a:xfrm>
+            <a:off x="3441970" y="827776"/>
+            <a:ext cx="4964743" cy="4919881"/>
+          </a:xfrm>
+          <a:prstGeom prst="rect">
+            <a:avLst/>
+          </a:prstGeom>
+        </p:spPr>
+      </p:pic>
+    </p:spTree>
+    <p:extLst>
+      <p:ext uri="{BB962C8B-B14F-4D97-AF65-F5344CB8AC3E}">
+        <p14:creationId xmlns:p14="http://schemas.microsoft.com/office/powerpoint/2010/main" val="829171626"/>
+      </p:ext>
+    </p:extLst>
+  </p:cSld>
+  <p:clrMapOvr>
+    <a:masterClrMapping/>
+  </p:clrMapOvr>
+</p:sld>
+</file>
+
+<file path=ppt/slides/slide4.xml><?xml version="1.0" encoding="utf-8"?>
+<p:sld xmlns:a="http://schemas.openxmlformats.org/drawingml/2006/main" xmlns:r="http://schemas.openxmlformats.org/officeDocument/2006/relationships" xmlns:p="http://schemas.openxmlformats.org/presentationml/2006/main">
+  <p:cSld>
+    <p:spTree>
+      <p:nvGrpSpPr>
+        <p:cNvPr id="1" name=""/>
+        <p:cNvGrpSpPr/>
+        <p:nvPr/>
+      </p:nvGrpSpPr>
+      <p:grpSpPr>
+        <a:xfrm>
+          <a:off x="0" y="0"/>
+          <a:ext cx="0" cy="0"/>
+          <a:chOff x="0" y="0"/>
+          <a:chExt cx="0" cy="0"/>
+        </a:xfrm>
+      </p:grpSpPr>
+      <p:sp>
+        <p:nvSpPr>
+          <p:cNvPr id="2" name="Title 1">
+            <a:extLst>
+              <a:ext uri="{FF2B5EF4-FFF2-40B4-BE49-F238E27FC236}">
+                <a16:creationId xmlns:a16="http://schemas.microsoft.com/office/drawing/2014/main" id="{C6AF6279-C199-0394-7B7F-EED41DCE8B11}"/>
+              </a:ext>
+            </a:extLst>
+          </p:cNvPr>
+          <p:cNvSpPr>
+            <a:spLocks noGrp="1"/>
+          </p:cNvSpPr>
+          <p:nvPr>
+            <p:ph type="title"/>
+          </p:nvPr>
+        </p:nvSpPr>
+        <p:spPr/>
+        <p:txBody>
+          <a:bodyPr/>
+          <a:lstStyle/>
+          <a:p>
+            <a:endParaRPr lang="en-IN"/>
+          </a:p>
+        </p:txBody>
+      </p:sp>
+      <p:sp>
+        <p:nvSpPr>
+          <p:cNvPr id="3" name="Content Placeholder 2">
+            <a:extLst>
+              <a:ext uri="{FF2B5EF4-FFF2-40B4-BE49-F238E27FC236}">
+                <a16:creationId xmlns:a16="http://schemas.microsoft.com/office/drawing/2014/main" id="{3D915A6B-FA24-BA80-3EE4-975DF3301C56}"/>
+              </a:ext>
+            </a:extLst>
+          </p:cNvPr>
+          <p:cNvSpPr>
+            <a:spLocks noGrp="1"/>
+          </p:cNvSpPr>
+          <p:nvPr>
+            <p:ph idx="1"/>
+          </p:nvPr>
+        </p:nvSpPr>
+        <p:spPr/>
+        <p:txBody>
+          <a:bodyPr/>
+          <a:lstStyle/>
+          <a:p>
+            <a:endParaRPr lang="en-IN"/>
+          </a:p>
+        </p:txBody>
+      </p:sp>
+      <p:pic>
+        <p:nvPicPr>
+          <p:cNvPr id="7" name="Picture 6">
+            <a:extLst>
+              <a:ext uri="{FF2B5EF4-FFF2-40B4-BE49-F238E27FC236}">
+                <a16:creationId xmlns:a16="http://schemas.microsoft.com/office/drawing/2014/main" id="{55703D91-C6FE-DF37-E790-12BF14C64E29}"/>
+              </a:ext>
+            </a:extLst>
+          </p:cNvPr>
+          <p:cNvPicPr>
+            <a:picLocks noChangeAspect="1"/>
+          </p:cNvPicPr>
+          <p:nvPr/>
+        </p:nvPicPr>
+        <p:blipFill>
+          <a:blip r:embed="rId2"/>
+          <a:stretch>
+            <a:fillRect/>
+          </a:stretch>
+        </p:blipFill>
+        <p:spPr>
+          <a:xfrm>
+            <a:off x="0" y="437286"/>
+            <a:ext cx="12192000" cy="5983427"/>
+          </a:xfrm>
+          <a:prstGeom prst="rect">
+            <a:avLst/>
+          </a:prstGeom>
+        </p:spPr>
+      </p:pic>
+    </p:spTree>
+    <p:extLst>
+      <p:ext uri="{BB962C8B-B14F-4D97-AF65-F5344CB8AC3E}">
+        <p14:creationId xmlns:p14="http://schemas.microsoft.com/office/powerpoint/2010/main" val="1931896425"/>
+      </p:ext>
+    </p:extLst>
+  </p:cSld>
+  <p:clrMapOvr>
+    <a:masterClrMapping/>
+  </p:clrMapOvr>
+</p:sld>
+</file>
+
+<file path=ppt/slides/slide5.xml><?xml version="1.0" encoding="utf-8"?>
+<p:sld xmlns:a="http://schemas.openxmlformats.org/drawingml/2006/main" xmlns:r="http://schemas.openxmlformats.org/officeDocument/2006/relationships" xmlns:p="http://schemas.openxmlformats.org/presentationml/2006/main">
+  <p:cSld>
+    <p:spTree>
+      <p:nvGrpSpPr>
+        <p:cNvPr id="1" name=""/>
+        <p:cNvGrpSpPr/>
+        <p:nvPr/>
+      </p:nvGrpSpPr>
+      <p:grpSpPr>
+        <a:xfrm>
+          <a:off x="0" y="0"/>
+          <a:ext cx="0" cy="0"/>
+          <a:chOff x="0" y="0"/>
+          <a:chExt cx="0" cy="0"/>
+        </a:xfrm>
+      </p:grpSpPr>
+      <p:sp>
+        <p:nvSpPr>
+          <p:cNvPr id="2" name="Title 1">
+            <a:extLst>
+              <a:ext uri="{FF2B5EF4-FFF2-40B4-BE49-F238E27FC236}">
+                <a16:creationId xmlns:a16="http://schemas.microsoft.com/office/drawing/2014/main" id="{1AC41765-B2C5-6487-8CC2-C6F738209905}"/>
+              </a:ext>
+            </a:extLst>
+          </p:cNvPr>
+          <p:cNvSpPr>
+            <a:spLocks noGrp="1"/>
+          </p:cNvSpPr>
+          <p:nvPr>
+            <p:ph type="title"/>
+          </p:nvPr>
+        </p:nvSpPr>
+        <p:spPr/>
+        <p:txBody>
+          <a:bodyPr/>
+          <a:lstStyle/>
+          <a:p>
+            <a:endParaRPr lang="en-IN"/>
+          </a:p>
+        </p:txBody>
+      </p:sp>
+      <p:sp>
+        <p:nvSpPr>
+          <p:cNvPr id="3" name="Content Placeholder 2">
+            <a:extLst>
+              <a:ext uri="{FF2B5EF4-FFF2-40B4-BE49-F238E27FC236}">
+                <a16:creationId xmlns:a16="http://schemas.microsoft.com/office/drawing/2014/main" id="{DAAEE0F3-E7A4-551A-8F87-266521000AA8}"/>
+              </a:ext>
+            </a:extLst>
+          </p:cNvPr>
+          <p:cNvSpPr>
+            <a:spLocks noGrp="1"/>
+          </p:cNvSpPr>
+          <p:nvPr>
+            <p:ph idx="1"/>
+          </p:nvPr>
+        </p:nvSpPr>
+        <p:spPr/>
+        <p:txBody>
+          <a:bodyPr/>
+          <a:lstStyle/>
+          <a:p>
+            <a:endParaRPr lang="en-IN"/>
+          </a:p>
+        </p:txBody>
+      </p:sp>
+      <p:pic>
+        <p:nvPicPr>
+          <p:cNvPr id="5" name="Picture 4">
+            <a:extLst>
+              <a:ext uri="{FF2B5EF4-FFF2-40B4-BE49-F238E27FC236}">
+                <a16:creationId xmlns:a16="http://schemas.microsoft.com/office/drawing/2014/main" id="{587E643B-DE8C-4DAF-411E-A1BFC14CC38C}"/>
+              </a:ext>
+            </a:extLst>
+          </p:cNvPr>
+          <p:cNvPicPr>
+            <a:picLocks noChangeAspect="1"/>
+          </p:cNvPicPr>
+          <p:nvPr/>
+        </p:nvPicPr>
+        <p:blipFill>
+          <a:blip r:embed="rId2"/>
+          <a:stretch>
+            <a:fillRect/>
+          </a:stretch>
+        </p:blipFill>
+        <p:spPr>
+          <a:xfrm>
+            <a:off x="0" y="342284"/>
+            <a:ext cx="12192000" cy="6173432"/>
+          </a:xfrm>
+          <a:prstGeom prst="rect">
+            <a:avLst/>
+          </a:prstGeom>
+        </p:spPr>
+      </p:pic>
+    </p:spTree>
+    <p:extLst>
+      <p:ext uri="{BB962C8B-B14F-4D97-AF65-F5344CB8AC3E}">
+        <p14:creationId xmlns:p14="http://schemas.microsoft.com/office/powerpoint/2010/main" val="2950099178"/>
+      </p:ext>
+    </p:extLst>
+  </p:cSld>
+  <p:clrMapOvr>
+    <a:masterClrMapping/>
+  </p:clrMapOvr>
+</p:sld>
+</file>
+
+<file path=ppt/slides/slide6.xml><?xml version="1.0" encoding="utf-8"?>
+<p:sld xmlns:a="http://schemas.openxmlformats.org/drawingml/2006/main" xmlns:r="http://schemas.openxmlformats.org/officeDocument/2006/relationships" xmlns:p="http://schemas.openxmlformats.org/presentationml/2006/main">
+  <p:cSld>
+    <p:spTree>
+      <p:nvGrpSpPr>
+        <p:cNvPr id="1" name=""/>
+        <p:cNvGrpSpPr/>
+        <p:nvPr/>
+      </p:nvGrpSpPr>
+      <p:grpSpPr>
+        <a:xfrm>
+          <a:off x="0" y="0"/>
+          <a:ext cx="0" cy="0"/>
+          <a:chOff x="0" y="0"/>
+          <a:chExt cx="0" cy="0"/>
+        </a:xfrm>
+      </p:grpSpPr>
+      <p:sp>
+        <p:nvSpPr>
+          <p:cNvPr id="2" name="Title 1">
+            <a:extLst>
+              <a:ext uri="{FF2B5EF4-FFF2-40B4-BE49-F238E27FC236}">
+                <a16:creationId xmlns:a16="http://schemas.microsoft.com/office/drawing/2014/main" id="{06ADE94D-9D97-DEDA-5E3F-10A6F0A4823C}"/>
+              </a:ext>
+            </a:extLst>
+          </p:cNvPr>
+          <p:cNvSpPr>
+            <a:spLocks noGrp="1"/>
+          </p:cNvSpPr>
+          <p:nvPr>
+            <p:ph type="title"/>
+          </p:nvPr>
+        </p:nvSpPr>
+        <p:spPr/>
+        <p:txBody>
+          <a:bodyPr/>
+          <a:lstStyle/>
+          <a:p>
+            <a:endParaRPr lang="en-IN"/>
+          </a:p>
+        </p:txBody>
+      </p:sp>
+      <p:sp>
+        <p:nvSpPr>
+          <p:cNvPr id="3" name="Content Placeholder 2">
+            <a:extLst>
+              <a:ext uri="{FF2B5EF4-FFF2-40B4-BE49-F238E27FC236}">
+                <a16:creationId xmlns:a16="http://schemas.microsoft.com/office/drawing/2014/main" id="{E532F42A-CB71-42F2-1458-87F8D843DBF1}"/>
+              </a:ext>
+            </a:extLst>
+          </p:cNvPr>
+          <p:cNvSpPr>
+            <a:spLocks noGrp="1"/>
+          </p:cNvSpPr>
+          <p:nvPr>
+            <p:ph idx="1"/>
+          </p:nvPr>
+        </p:nvSpPr>
+        <p:spPr/>
+        <p:txBody>
+          <a:bodyPr/>
+          <a:lstStyle/>
+          <a:p>
+            <a:endParaRPr lang="en-IN"/>
+          </a:p>
+        </p:txBody>
+      </p:sp>
+      <p:pic>
+        <p:nvPicPr>
+          <p:cNvPr id="5" name="Picture 4">
+            <a:extLst>
+              <a:ext uri="{FF2B5EF4-FFF2-40B4-BE49-F238E27FC236}">
+                <a16:creationId xmlns:a16="http://schemas.microsoft.com/office/drawing/2014/main" id="{D83C755F-8864-38D3-43AE-BB9E99AAD3C5}"/>
+              </a:ext>
+            </a:extLst>
+          </p:cNvPr>
+          <p:cNvPicPr>
+            <a:picLocks noChangeAspect="1"/>
+          </p:cNvPicPr>
+          <p:nvPr/>
+        </p:nvPicPr>
+        <p:blipFill>
+          <a:blip r:embed="rId2"/>
+          <a:stretch>
+            <a:fillRect/>
+          </a:stretch>
+        </p:blipFill>
+        <p:spPr>
+          <a:xfrm>
+            <a:off x="602602" y="0"/>
+            <a:ext cx="10986795" cy="6858000"/>
+          </a:xfrm>
+          <a:prstGeom prst="rect">
+            <a:avLst/>
+          </a:prstGeom>
+        </p:spPr>
+      </p:pic>
+    </p:spTree>
+    <p:extLst>
+      <p:ext uri="{BB962C8B-B14F-4D97-AF65-F5344CB8AC3E}">
+        <p14:creationId xmlns:p14="http://schemas.microsoft.com/office/powerpoint/2010/main" val="3462483619"/>
       </p:ext>
     </p:extLst>
   </p:cSld>
